--- a/domain-seminars/week05_value_based_payment.pptx
+++ b/domain-seminars/week05_value_based_payment.pptx
@@ -506,7 +506,7 @@
           <a:lstStyle/>
           <a:p>
             <a:r>
-              <a:t>Domain seminar for week 5: Value-Based Payment and Attribution. It follows the course pattern: basics and terminology, where the topic sits in industry and policy, reform goals, how analytics is deployed, and how analytics drives decisions. Replace this note with your own opening remarks.</a:t>
+              <a:t>Domain seminar for week 5: Value Based Payment Current State. It follows the course pattern: basics and terminology, where the topic sits in industry and policy, reform goals, how analytics is deployed, and how analytics drives decisions. Replace this note with your own opening remarks.</a:t>
             </a:r>
           </a:p>
         </p:txBody>
@@ -1506,7 +1506,7 @@
 </p:sldMaster>
 </file>
 
-<file path=ppt/slides/slide11.xml><?xml version="1.0" encoding="utf-8"?>
+<file path=ppt/slides/slide1.xml><?xml version="1.0" encoding="utf-8"?>
 <p:sld xmlns:a="http://schemas.openxmlformats.org/drawingml/2006/main" xmlns:p="http://schemas.openxmlformats.org/presentationml/2006/main" xmlns:r="http://schemas.openxmlformats.org/officeDocument/2006/relationships">
   <p:cSld>
     <p:spTree>
@@ -1548,7 +1548,7 @@
                   <a:srgbClr val="FFFFFF"/>
                 </a:solidFill>
               </a:rPr>
-              <a:t>Value-Based Payment and Attribution</a:t>
+              <a:t>Value Based Payment Current State</a:t>
             </a:r>
             <a:endParaRPr lang="en-US" sz="4000" dirty="0"/>
           </a:p>
@@ -1600,7 +1600,7 @@
 </p:sld>
 </file>
 
-<file path=ppt/slides/slide12.xml><?xml version="1.0" encoding="utf-8"?>
+<file path=ppt/slides/slide2.xml><?xml version="1.0" encoding="utf-8"?>
 <p:sld xmlns:a="http://schemas.openxmlformats.org/drawingml/2006/main" xmlns:p="http://schemas.openxmlformats.org/presentationml/2006/main" xmlns:r="http://schemas.openxmlformats.org/officeDocument/2006/relationships">
   <p:cSld>
     <p:spTree>
@@ -1797,7 +1797,7 @@
 </p:sld>
 </file>
 
-<file path=ppt/slides/slide13.xml><?xml version="1.0" encoding="utf-8"?>
+<file path=ppt/slides/slide3.xml><?xml version="1.0" encoding="utf-8"?>
 <p:sld xmlns:a="http://schemas.openxmlformats.org/drawingml/2006/main" xmlns:p="http://schemas.openxmlformats.org/presentationml/2006/main" xmlns:r="http://schemas.openxmlformats.org/officeDocument/2006/relationships">
   <p:cSld>
     <p:spTree>
@@ -1994,7 +1994,7 @@
 </p:sld>
 </file>
 
-<file path=ppt/slides/slide14.xml><?xml version="1.0" encoding="utf-8"?>
+<file path=ppt/slides/slide4.xml><?xml version="1.0" encoding="utf-8"?>
 <p:sld xmlns:a="http://schemas.openxmlformats.org/drawingml/2006/main" xmlns:p="http://schemas.openxmlformats.org/presentationml/2006/main" xmlns:r="http://schemas.openxmlformats.org/officeDocument/2006/relationships">
   <p:cSld>
     <p:spTree>
@@ -2191,7 +2191,7 @@
 </p:sld>
 </file>
 
-<file path=ppt/slides/slide15.xml><?xml version="1.0" encoding="utf-8"?>
+<file path=ppt/slides/slide5.xml><?xml version="1.0" encoding="utf-8"?>
 <p:sld xmlns:a="http://schemas.openxmlformats.org/drawingml/2006/main" xmlns:p="http://schemas.openxmlformats.org/presentationml/2006/main" xmlns:r="http://schemas.openxmlformats.org/officeDocument/2006/relationships">
   <p:cSld>
     <p:spTree>
@@ -2388,7 +2388,7 @@
 </p:sld>
 </file>
 
-<file path=ppt/slides/slide16.xml><?xml version="1.0" encoding="utf-8"?>
+<file path=ppt/slides/slide6.xml><?xml version="1.0" encoding="utf-8"?>
 <p:sld xmlns:a="http://schemas.openxmlformats.org/drawingml/2006/main" xmlns:p="http://schemas.openxmlformats.org/presentationml/2006/main" xmlns:r="http://schemas.openxmlformats.org/officeDocument/2006/relationships">
   <p:cSld>
     <p:spTree>

--- a/domain-seminars/week05_value_based_payment.pptx
+++ b/domain-seminars/week05_value_based_payment.pptx
@@ -506,7 +506,7 @@
           <a:lstStyle/>
           <a:p>
             <a:r>
-              <a:t>Domain seminar for week 5: Value Based Payment Current State. It follows the course pattern: basics and terminology, where the topic sits in industry and policy, reform goals, how analytics is deployed, and how analytics drives decisions. Replace this note with your own opening remarks.</a:t>
+              <a:t>Domain seminar for week 5: Value Based Payment Current State. We will go through basics and terminology, where the topic is found across industry and policy, reform goals, how analytics is deployed, and how analytics drives decisions. Provide opening remarks here.</a:t>
             </a:r>
           </a:p>
         </p:txBody>

--- a/domain-seminars/week05_value_based_payment.pptx
+++ b/domain-seminars/week05_value_based_payment.pptx
@@ -11,6 +11,7 @@
     <p:sldId id="269" r:id="rId20"/>
     <p:sldId id="270" r:id="rId21"/>
     <p:sldId id="271" r:id="rId22"/>
+    <p:sldId id="272" r:id="rId11"/>
   </p:sldIdLst>
   <p:notesMasterIdLst>
     <p:notesMasterId r:id="rId12"/>
@@ -857,6 +858,76 @@
           <a:p>
             <a:r>
               <a:t>Medicare's MSSP assigns each beneficiary to the practice that provided the plurality of their primary care services, with steps for specialists when no primary care visits exist. HMO assignment is set at enrollment and often reflects auto-assignment rather than where the member actually goes. When the two disagree, care managers call patients who don't know them, and quality gaps land on the wrong practice.</a:t>
+            </a:r>
+          </a:p>
+        </p:txBody>
+      </p:sp>
+      <p:sp>
+        <p:nvSpPr>
+          <p:cNvPr id="4" name="Slide Number Placeholder 3"/>
+          <p:cNvSpPr>
+            <a:spLocks noGrp="1"/>
+          </p:cNvSpPr>
+          <p:nvPr>
+            <p:ph type="sldNum" idx="5" sz="quarter"/>
+          </p:nvPr>
+        </p:nvSpPr>
+        <p:spPr/>
+      </p:sp>
+    </p:spTree>
+  </p:cSld>
+  <p:clrMapOvr>
+    <a:masterClrMapping/>
+  </p:clrMapOvr>
+</p:notes>
+</file>
+
+<file path=ppt/notesSlides/notesSlide7.xml><?xml version="1.0" encoding="utf-8"?>
+<p:notes xmlns:a="http://schemas.openxmlformats.org/drawingml/2006/main" xmlns:p="http://schemas.openxmlformats.org/presentationml/2006/main" xmlns:r="http://schemas.openxmlformats.org/officeDocument/2006/relationships">
+  <p:cSld>
+    <p:spTree>
+      <p:nvGrpSpPr>
+        <p:cNvPr id="1" name=""/>
+        <p:cNvGrpSpPr/>
+        <p:nvPr/>
+      </p:nvGrpSpPr>
+      <p:grpSpPr>
+        <a:xfrm>
+          <a:off x="0" y="0"/>
+          <a:ext cx="0" cy="0"/>
+          <a:chOff x="0" y="0"/>
+          <a:chExt cx="0" cy="0"/>
+        </a:xfrm>
+      </p:grpSpPr>
+      <p:sp>
+        <p:nvSpPr>
+          <p:cNvPr id="2" name="Slide Image Placeholder 1"/>
+          <p:cNvSpPr>
+            <a:spLocks noGrp="1"/>
+          </p:cNvSpPr>
+          <p:nvPr>
+            <p:ph type="sldImg" idx="2"/>
+          </p:nvPr>
+        </p:nvSpPr>
+        <p:spPr/>
+      </p:sp>
+      <p:sp>
+        <p:nvSpPr>
+          <p:cNvPr id="3" name="Notes Placeholder 2"/>
+          <p:cNvSpPr>
+            <a:spLocks noGrp="1"/>
+          </p:cNvSpPr>
+          <p:nvPr>
+            <p:ph type="body" idx="3" sz="quarter"/>
+          </p:nvPr>
+        </p:nvSpPr>
+        <p:spPr/>
+        <p:txBody>
+          <a:bodyPr/>
+          <a:lstStyle/>
+          <a:p>
+            <a:r>
+              <a:t>Give students a few minutes to write an answer drawn from their own experience and career, then ask two or three to share. Connect their examples back to this seminar's content. In an online section, post the same question to the discussion board.</a:t>
             </a:r>
           </a:p>
         </p:txBody>
@@ -2572,6 +2643,167 @@
             <a:fld id="{F7021451-1387-4CA6-816F-3879F97B5CBC}" type="slidenum">
               <a:rPr b="0" lang="en-US"/>
               <a:t>6</a:t>
+            </a:fld>
+            <a:endParaRPr lang="en-US"/>
+          </a:p>
+        </p:txBody>
+      </p:sp>
+    </p:spTree>
+  </p:cSld>
+  <p:clrMapOvr>
+    <a:masterClrMapping/>
+  </p:clrMapOvr>
+</p:sld>
+</file>
+
+<file path=ppt/slides/slide7.xml><?xml version="1.0" encoding="utf-8"?>
+<p:sld xmlns:a="http://schemas.openxmlformats.org/drawingml/2006/main" xmlns:p="http://schemas.openxmlformats.org/presentationml/2006/main" xmlns:r="http://schemas.openxmlformats.org/officeDocument/2006/relationships">
+  <p:cSld>
+    <p:spTree>
+      <p:nvGrpSpPr>
+        <p:cNvPr id="1" name=""/>
+        <p:cNvGrpSpPr/>
+        <p:nvPr/>
+      </p:nvGrpSpPr>
+      <p:grpSpPr/>
+      <p:sp>
+        <p:nvSpPr>
+          <p:cNvPr id="2" name="Text 0"/>
+          <p:cNvSpPr/>
+          <p:nvPr>
+            <p:ph idx="100" type="title" hasCustomPrompt="1"/>
+          </p:nvPr>
+        </p:nvSpPr>
+        <p:spPr>
+          <a:xfrm>
+            <a:off x="731520" y="457200"/>
+            <a:ext cx="10698480" cy="822960"/>
+          </a:xfrm>
+          <a:prstGeom prst="rect">
+            <a:avLst/>
+          </a:prstGeom>
+          <a:noFill/>
+          <a:ln/>
+        </p:spPr>
+        <p:txBody>
+          <a:bodyPr wrap="square" lIns="0" tIns="0" rIns="0" bIns="0" rtlCol="0" anchor="t"/>
+          <a:lstStyle/>
+          <a:p>
+            <a:pPr algn="l" indent="0" marL="0">
+              <a:buNone/>
+            </a:pPr>
+            <a:r>
+              <a:rPr lang="en-US" sz="3200" b="1" dirty="0">
+                <a:solidFill>
+                  <a:srgbClr val="FFFFFF"/>
+                </a:solidFill>
+              </a:rPr>
+              <a:t>Discussion</a:t>
+            </a:r>
+            <a:endParaRPr lang="en-US" sz="3200" dirty="0"/>
+          </a:p>
+        </p:txBody>
+      </p:sp>
+      <p:sp>
+        <p:nvSpPr>
+          <p:cNvPr id="3" name="Text 0"/>
+          <p:cNvSpPr/>
+          <p:nvPr>
+            <p:ph idx="101" type="body" hasCustomPrompt="1"/>
+          </p:nvPr>
+        </p:nvSpPr>
+        <p:spPr>
+          <a:xfrm>
+            <a:off x="731520" y="1554480"/>
+            <a:ext cx="10698480" cy="4754880"/>
+          </a:xfrm>
+          <a:prstGeom prst="rect">
+            <a:avLst/>
+          </a:prstGeom>
+          <a:noFill/>
+          <a:ln/>
+        </p:spPr>
+        <p:txBody>
+          <a:bodyPr wrap="square" rtlCol="0" anchor="t"/>
+          <a:lstStyle/>
+          <a:p>
+            <a:pPr algn="l" marL="342900" indent="-342900">
+              <a:spcAft>
+                <a:spcPts val="1000"/>
+              </a:spcAft>
+              <a:buSzPct val="100000"/>
+              <a:buChar char="•"/>
+            </a:pPr>
+            <a:r>
+              <a:rPr lang="en-US" sz="2400" dirty="0">
+                <a:solidFill>
+                  <a:srgbClr val="FFFFFF"/>
+                </a:solidFill>
+              </a:rPr>
+              <a:t>How is your organization, or one you know well, paid for quality and cost today, and which patients does it count as its own?</a:t>
+            </a:r>
+            <a:endParaRPr lang="en-US" sz="2400" dirty="0"/>
+          </a:p>
+          <a:p>
+            <a:pPr algn="l" marL="342900" indent="-342900">
+              <a:spcAft>
+                <a:spcPts val="1000"/>
+              </a:spcAft>
+              <a:buSzPct val="100000"/>
+              <a:buChar char="•"/>
+            </a:pPr>
+            <a:r>
+              <a:rPr lang="en-US" sz="2400" dirty="0">
+                <a:solidFill>
+                  <a:srgbClr val="FFFFFF"/>
+                </a:solidFill>
+              </a:rPr>
+              <a:t>Draw on your own experience and career, and apply today's seminar to that setting.</a:t>
+            </a:r>
+            <a:endParaRPr lang="en-US" sz="2400" dirty="0"/>
+          </a:p>
+        </p:txBody>
+      </p:sp>
+      <p:sp>
+        <p:nvSpPr>
+          <p:cNvPr id="25" name="Slide Number Placeholder 0"/>
+          <p:cNvSpPr>
+            <a:spLocks noGrp="1"/>
+          </p:cNvSpPr>
+          <p:nvPr>
+            <p:ph type="sldNum" sz="quarter" idx="4294967295"/>
+          </p:nvPr>
+        </p:nvSpPr>
+        <p:spPr>
+          <a:xfrm>
+            <a:off x="10972800" y="6400800"/>
+            <a:ext cx="548640" cy="274320"/>
+          </a:xfrm>
+          <a:prstGeom prst="rect">
+            <a:avLst/>
+          </a:prstGeom>
+          <a:extLst>
+            <a:ext uri="{C572A759-6A51-4108-AA02-DFA0A04FC94B}">
+              <ma14:wrappingTextBoxFlag xmlns:ma14="http://schemas.microsoft.com/office/mac/drawingml/2011/main" val="0"/>
+            </a:ext>
+          </a:extLst>
+        </p:spPr>
+        <p:txBody>
+          <a:bodyPr/>
+          <a:lstStyle>
+            <a:lvl1pPr>
+              <a:defRPr sz="1000">
+                <a:solidFill>
+                  <a:srgbClr val="BFBFBF"/>
+                </a:solidFill>
+              </a:defRPr>
+            </a:lvl1pPr>
+          </a:lstStyle>
+          <a:p>
+            <a:pPr algn="r"/>
+            <a:fld id="{F7021451-1387-4CA6-816F-3879F97B5CBC}" type="slidenum">
+              <a:rPr b="0" lang="en-US"/>
+              <a:t>7</a:t>
             </a:fld>
             <a:endParaRPr lang="en-US"/>
           </a:p>

--- a/domain-seminars/week05_value_based_payment.pptx
+++ b/domain-seminars/week05_value_based_payment.pptx
@@ -1619,7 +1619,7 @@
                   <a:srgbClr val="FFFFFF"/>
                 </a:solidFill>
               </a:rPr>
-              <a:t>Value Based Payment Current State</a:t>
+              <a:t>Week 5: Value Based Payment Current State</a:t>
             </a:r>
             <a:endParaRPr lang="en-US" sz="4000" dirty="0"/>
           </a:p>
